--- a/outputs/ophthalmology-batch-20261011/strabismus/algorithm_editable.pptx
+++ b/outputs/ophthalmology-batch-20261011/strabismus/algorithm_editable.pptx
@@ -630,7 +630,7 @@
           <a:p/>
           <a:p>
             <a:r>
-              <a:t>strabismus-09 间歇外斜分型：基本型远近差&lt;10△；分开过强远&gt;近≥15△，遮盖一眼30～60 min仍大；集合不足近&gt;远≥15△；类似分开过强型遮盖后近角增大。</a:t>
+              <a:t>strabismus-09 间歇外斜分型：基本型远近差&lt;10△；分开过强型：远距斜视度较近距大，差值≥15△，遮盖一眼30～60 min仍大；集合不足型：近距斜视度较远距大，差值≥15△；类似分开过强型遮盖后近角增大。</a:t>
             </a:r>
           </a:p>
           <a:p>
@@ -4083,7 +4083,7 @@
       </p:sp>
       <p:sp>
         <p:nvSpPr>
-          <p:cNvPr id="7" name="全面眼检查/双眼视；儿童麻痹验光；急性/非共同或外伤 → 先病因与必要神经/眶影像。"/>
+          <p:cNvPr id="7" name="全面眼检查/双眼视；儿童睫状肌麻痹验光；急性/非共同或外伤 → 先病因与必要神经/眶影像。"/>
           <p:cNvSpPr txBox="1"/>
           <p:nvPr/>
         </p:nvSpPr>
@@ -4123,7 +4123,7 @@
                 <a:ea typeface="Microsoft YaHei"/>
                 <a:cs typeface="Microsoft YaHei"/>
               </a:rPr>
-              <a:t>全面眼检查/双眼视；儿童麻痹验光；急性/非共同或外</a:t>
+              <a:t>全面眼检查/双眼视；儿童睫状肌麻痹验光；急性/非共</a:t>
             </a:r>
           </a:p>
           <a:p>
@@ -4147,7 +4147,7 @@
                 <a:ea typeface="Microsoft YaHei"/>
                 <a:cs typeface="Microsoft YaHei"/>
               </a:rPr>
-              <a:t>伤 → 先病因与必要神经/眶影像。</a:t>
+              <a:t>同或外伤 → 先病因与必要神经/眶影像。</a:t>
             </a:r>
           </a:p>
         </p:txBody>
@@ -5313,14 +5313,14 @@
       </p:sp>
       <p:sp>
         <p:nvSpPr>
-          <p:cNvPr id="32" name="按2026术前方案；术后1天、1周、1/3/6月，后6～12月；术后异常受限+复视及时排滑脱。"/>
+          <p:cNvPr id="32" name="按2026术前方案；术后第1天、第1周、第1、3、6个月，此后每6～12个月；术后异常受限+复视及时"/>
           <p:cNvSpPr txBox="1"/>
           <p:nvPr/>
         </p:nvSpPr>
         <p:spPr>
           <a:xfrm>
             <a:off x="5688900" y="5785066"/>
-            <a:ext cx="4482400" cy="477520"/>
+            <a:ext cx="4482400" cy="684530"/>
           </a:xfrm>
           <a:prstGeom prst="rect">
             <a:avLst/>
@@ -5353,7 +5353,7 @@
                 <a:ea typeface="Microsoft YaHei"/>
                 <a:cs typeface="Microsoft YaHei"/>
               </a:rPr>
-              <a:t>按2026术前方案；术后1天、1周、1/3/6月，后6～12</a:t>
+              <a:t>按2026术前方案；术后第1天、第1周、第1、3、6个</a:t>
             </a:r>
           </a:p>
           <a:p>
@@ -5377,7 +5377,31 @@
                 <a:ea typeface="Microsoft YaHei"/>
                 <a:cs typeface="Microsoft YaHei"/>
               </a:rPr>
-              <a:t>月；术后异常受限+复视及时排滑脱。</a:t>
+              <a:t>月，此后每6～12个月；术后异常受限+复视及时排滑</a:t>
+            </a:r>
+          </a:p>
+          <a:p>
+            <a:pPr>
+              <a:lnSpc>
+                <a:spcPts val="1630"/>
+              </a:lnSpc>
+              <a:spcBef>
+                <a:spcPts val="0"/>
+              </a:spcBef>
+              <a:spcAft>
+                <a:spcPts val="0"/>
+              </a:spcAft>
+            </a:pPr>
+            <a:r>
+              <a:rPr sz="1340" b="0" lang="zh-CN">
+                <a:solidFill>
+                  <a:srgbClr val="1E2E3B"/>
+                </a:solidFill>
+                <a:latin typeface="Microsoft YaHei"/>
+                <a:ea typeface="Microsoft YaHei"/>
+                <a:cs typeface="Microsoft YaHei"/>
+              </a:rPr>
+              <a:t>脱。</a:t>
             </a:r>
           </a:p>
         </p:txBody>
